--- a/Reporting/Claude Presents/Templates/EL_Claude_Template_v001.pptx
+++ b/Reporting/Claude Presents/Templates/EL_Claude_Template_v001.pptx
@@ -1304,12 +1304,6 @@
             <a:off x="10085832" y="530352"/>
             <a:ext cx="1554480" cy="365760"/>
           </a:xfrm>
-          <a:prstGeom prst="roundRect">
-            <a:avLst>
-              <a:gd name="adj" fmla="val 30000"/>
-            </a:avLst>
-          </a:prstGeom>
-          <a:noFill/>
         </p:spPr>
         <p:txBody>
           <a:bodyPr vert="horz" wrap="square" lIns="54864" tIns="0" rIns="54864" bIns="0" rtlCol="0" anchor="ctr">
@@ -5088,12 +5082,6 @@
             <a:off x="10085832" y="530352"/>
             <a:ext cx="1554480" cy="365760"/>
           </a:xfrm>
-          <a:prstGeom prst="roundRect">
-            <a:avLst>
-              <a:gd name="adj" fmla="val 30000"/>
-            </a:avLst>
-          </a:prstGeom>
-          <a:noFill/>
         </p:spPr>
         <p:txBody>
           <a:bodyPr vert="horz" wrap="square" lIns="54864" tIns="0" rIns="54864" bIns="0" rtlCol="0" anchor="ctr">
@@ -5399,12 +5387,6 @@
             <a:off x="10085832" y="530352"/>
             <a:ext cx="1554480" cy="365760"/>
           </a:xfrm>
-          <a:prstGeom prst="roundRect">
-            <a:avLst>
-              <a:gd name="adj" fmla="val 30000"/>
-            </a:avLst>
-          </a:prstGeom>
-          <a:noFill/>
         </p:spPr>
         <p:txBody>
           <a:bodyPr vert="horz" wrap="square" lIns="54864" tIns="0" rIns="54864" bIns="0" rtlCol="0" anchor="ctr">
@@ -5938,12 +5920,6 @@
             <a:off x="10085832" y="530352"/>
             <a:ext cx="1554480" cy="365760"/>
           </a:xfrm>
-          <a:prstGeom prst="roundRect">
-            <a:avLst>
-              <a:gd name="adj" fmla="val 30000"/>
-            </a:avLst>
-          </a:prstGeom>
-          <a:noFill/>
         </p:spPr>
         <p:txBody>
           <a:bodyPr vert="horz" wrap="square" lIns="54864" tIns="0" rIns="54864" bIns="0" rtlCol="0" anchor="ctr">
@@ -6421,12 +6397,6 @@
             <a:off x="10085832" y="530352"/>
             <a:ext cx="1554480" cy="365760"/>
           </a:xfrm>
-          <a:prstGeom prst="roundRect">
-            <a:avLst>
-              <a:gd name="adj" fmla="val 30000"/>
-            </a:avLst>
-          </a:prstGeom>
-          <a:noFill/>
         </p:spPr>
         <p:txBody>
           <a:bodyPr vert="horz" wrap="square" lIns="54864" tIns="0" rIns="54864" bIns="0" rtlCol="0" anchor="ctr">
@@ -6959,12 +6929,6 @@
             <a:off x="10085832" y="530352"/>
             <a:ext cx="1554480" cy="365760"/>
           </a:xfrm>
-          <a:prstGeom prst="roundRect">
-            <a:avLst>
-              <a:gd name="adj" fmla="val 30000"/>
-            </a:avLst>
-          </a:prstGeom>
-          <a:noFill/>
         </p:spPr>
         <p:txBody>
           <a:bodyPr vert="horz" wrap="square" lIns="54864" tIns="0" rIns="54864" bIns="0" rtlCol="0" anchor="ctr">
@@ -7950,12 +7914,6 @@
             <a:off x="10085832" y="530352"/>
             <a:ext cx="1554480" cy="365760"/>
           </a:xfrm>
-          <a:prstGeom prst="roundRect">
-            <a:avLst>
-              <a:gd name="adj" fmla="val 30000"/>
-            </a:avLst>
-          </a:prstGeom>
-          <a:noFill/>
         </p:spPr>
         <p:txBody>
           <a:bodyPr vert="horz" wrap="square" lIns="54864" tIns="0" rIns="54864" bIns="0" rtlCol="0" anchor="ctr">
@@ -9010,12 +8968,6 @@
             <a:off x="10085832" y="530352"/>
             <a:ext cx="1554480" cy="365760"/>
           </a:xfrm>
-          <a:prstGeom prst="roundRect">
-            <a:avLst>
-              <a:gd name="adj" fmla="val 30000"/>
-            </a:avLst>
-          </a:prstGeom>
-          <a:noFill/>
         </p:spPr>
         <p:txBody>
           <a:bodyPr vert="horz" wrap="square" lIns="54864" tIns="0" rIns="54864" bIns="0" rtlCol="0" anchor="ctr">
